--- a/cita_dual.pptx
+++ b/cita_dual.pptx
@@ -3090,7 +3090,7 @@
       <p:grpSpPr/>
       <p:pic>
         <p:nvPicPr>
-          <p:cNvPr id="2" name="Picture 1" descr="_tmp_fondo_antes.jpg"/>
+          <p:cNvPr id="2" name="Picture 1" descr="_tmp_fondo_cita_dual.jpg"/>
           <p:cNvPicPr>
             <a:picLocks noChangeAspect="1"/>
           </p:cNvPicPr>
@@ -3192,14 +3192,14 @@
       </p:sp>
       <p:pic>
         <p:nvPicPr>
-          <p:cNvPr id="5" name="Picture 4" descr="_tmp_fondo_despues.jpg"/>
+          <p:cNvPr id="5" name="Picture 4" descr="_tmp_fondo_cita_dual.jpg"/>
           <p:cNvPicPr>
             <a:picLocks noChangeAspect="1"/>
           </p:cNvPicPr>
           <p:nvPr/>
         </p:nvPicPr>
         <p:blipFill>
-          <a:blip r:embed="rId3"/>
+          <a:blip r:embed="rId2"/>
           <a:stretch>
             <a:fillRect/>
           </a:stretch>
